--- a/6. Coordinating Multiple Tasks/CoordinatingTasks.pptx
+++ b/6. Coordinating Multiple Tasks/CoordinatingTasks.pptx
@@ -255,7 +255,7 @@
               <a:rPr lang="en-US" smtClean="0">
                 <a:latin typeface="Segoe UI" pitchFamily="34" charset="0"/>
               </a:rPr>
-              <a:t>9/12/26 4:47 PM</a:t>
+              <a:t>9/14/26 7:58 PM</a:t>
             </a:fld>
             <a:endParaRPr lang="en-US">
               <a:latin typeface="Segoe UI" pitchFamily="34" charset="0"/>
@@ -533,7 +533,7 @@
           <a:p>
             <a:fld id="{D18B56EA-E28F-4F92-9F16-7A6F2501B303}" type="datetime8">
               <a:rPr lang="en-US" smtClean="0"/>
-              <a:t>9/12/26 4:47 PM</a:t>
+              <a:t>9/14/26 7:58 PM</a:t>
             </a:fld>
             <a:endParaRPr lang="en-US"/>
           </a:p>
@@ -7976,7 +7976,7 @@
         <p:spPr>
           <a:xfrm>
             <a:off x="274320" y="1627632"/>
-            <a:ext cx="5303520" cy="960263"/>
+            <a:ext cx="7615038" cy="960263"/>
           </a:xfrm>
         </p:spPr>
         <p:txBody>
@@ -8006,7 +8006,7 @@
         </p:blipFill>
         <p:spPr>
           <a:xfrm>
-            <a:off x="5577839" y="1869407"/>
+            <a:off x="5577840" y="2858235"/>
             <a:ext cx="6583680" cy="3987864"/>
           </a:xfrm>
           <a:prstGeom prst="rect">
@@ -8306,7 +8306,7 @@
         <p:spPr>
           <a:xfrm>
             <a:off x="274320" y="1627632"/>
-            <a:ext cx="5303520" cy="4636008"/>
+            <a:ext cx="8146666" cy="4636008"/>
           </a:xfrm>
         </p:spPr>
         <p:txBody>
@@ -8342,7 +8342,7 @@
         </p:blipFill>
         <p:spPr>
           <a:xfrm>
-            <a:off x="5577839" y="2136074"/>
+            <a:off x="5577840" y="3244720"/>
             <a:ext cx="6583680" cy="3454531"/>
           </a:xfrm>
           <a:prstGeom prst="rect">
@@ -8940,7 +8940,7 @@
         <p:spPr>
           <a:xfrm>
             <a:off x="274320" y="1627632"/>
-            <a:ext cx="5303520" cy="1822037"/>
+            <a:ext cx="8295522" cy="1822037"/>
           </a:xfrm>
         </p:spPr>
         <p:txBody>
@@ -8976,7 +8976,7 @@
         </p:blipFill>
         <p:spPr>
           <a:xfrm>
-            <a:off x="5577839" y="1940702"/>
+            <a:off x="5577840" y="2853976"/>
             <a:ext cx="6583680" cy="3845275"/>
           </a:xfrm>
           <a:prstGeom prst="rect">
@@ -9282,8 +9282,8 @@
         </p:nvSpPr>
         <p:spPr>
           <a:xfrm>
-            <a:off x="274320" y="1627632"/>
-            <a:ext cx="5303520" cy="4636008"/>
+            <a:off x="274319" y="1627632"/>
+            <a:ext cx="7625671" cy="4636008"/>
           </a:xfrm>
         </p:spPr>
         <p:txBody>
@@ -9319,7 +9319,7 @@
         </p:blipFill>
         <p:spPr>
           <a:xfrm>
-            <a:off x="5577839" y="1979789"/>
+            <a:off x="5492778" y="2932150"/>
             <a:ext cx="6583680" cy="3767101"/>
           </a:xfrm>
           <a:prstGeom prst="rect">
@@ -11173,6 +11173,15 @@
 </file>
 
 <file path=customXml/item2.xml><?xml version="1.0" encoding="utf-8"?>
+<?mso-contentType ?>
+<FormTemplates xmlns="http://schemas.microsoft.com/sharepoint/v3/contenttype/forms">
+  <Display>DocumentLibraryForm</Display>
+  <Edit>DocumentLibraryForm</Edit>
+  <New>DocumentLibraryForm</New>
+</FormTemplates>
+</file>
+
+<file path=customXml/item3.xml><?xml version="1.0" encoding="utf-8"?>
 <ct:contentTypeSchema xmlns:ct="http://schemas.microsoft.com/office/2006/metadata/contentType" xmlns:ma="http://schemas.microsoft.com/office/2006/metadata/properties/metaAttributes" ct:_="" ma:_="" ma:contentTypeName="Document" ma:contentTypeID="0x010100A33D2391BFF58241AEB203BD95DC1F89" ma:contentTypeVersion="16" ma:contentTypeDescription="Create a new document." ma:contentTypeScope="" ma:versionID="bd4b5e6fa70efd11586bd069caa6259f">
   <xsd:schema xmlns:xsd="http://www.w3.org/2001/XMLSchema" xmlns:xs="http://www.w3.org/2001/XMLSchema" xmlns:p="http://schemas.microsoft.com/office/2006/metadata/properties" xmlns:ns1="http://schemas.microsoft.com/sharepoint/v3" xmlns:ns2="16dc66bd-df5a-4495-a5c9-5e296f49988a" xmlns:ns3="12239fb0-26c0-4a37-b790-6c81fba9d0fc" targetNamespace="http://schemas.microsoft.com/office/2006/metadata/properties" ma:root="true" ma:fieldsID="1236f19879e555dfdef409a5be7c6d72" ns1:_="" ns2:_="" ns3:_="">
     <xsd:import namespace="http://schemas.microsoft.com/sharepoint/v3"/>
@@ -11418,15 +11427,6 @@
 </ct:contentTypeSchema>
 </file>
 
-<file path=customXml/item3.xml><?xml version="1.0" encoding="utf-8"?>
-<?mso-contentType ?>
-<FormTemplates xmlns="http://schemas.microsoft.com/sharepoint/v3/contenttype/forms">
-  <Display>DocumentLibraryForm</Display>
-  <Edit>DocumentLibraryForm</Edit>
-  <New>DocumentLibraryForm</New>
-</FormTemplates>
-</file>
-
 <file path=customXml/itemProps1.xml><?xml version="1.0" encoding="utf-8"?>
 <ds:datastoreItem xmlns:ds="http://schemas.openxmlformats.org/officeDocument/2006/customXml" ds:itemID="{B59C5458-A72E-4627-9FFC-D350DCB4700F}">
   <ds:schemaRefs>
@@ -11446,6 +11446,14 @@
 </file>
 
 <file path=customXml/itemProps2.xml><?xml version="1.0" encoding="utf-8"?>
+<ds:datastoreItem xmlns:ds="http://schemas.openxmlformats.org/officeDocument/2006/customXml" ds:itemID="{758FDAC0-319D-4A54-8D8E-1D42CB1F8004}">
+  <ds:schemaRefs>
+    <ds:schemaRef ds:uri="http://schemas.microsoft.com/sharepoint/v3/contenttype/forms"/>
+  </ds:schemaRefs>
+</ds:datastoreItem>
+</file>
+
+<file path=customXml/itemProps3.xml><?xml version="1.0" encoding="utf-8"?>
 <ds:datastoreItem xmlns:ds="http://schemas.openxmlformats.org/officeDocument/2006/customXml" ds:itemID="{F517AA3B-FC88-46DF-B5BA-DC6634CFCC94}">
   <ds:schemaRefs>
     <ds:schemaRef ds:uri="12239fb0-26c0-4a37-b790-6c81fba9d0fc"/>
@@ -11465,14 +11473,6 @@
 </ds:datastoreItem>
 </file>
 
-<file path=customXml/itemProps3.xml><?xml version="1.0" encoding="utf-8"?>
-<ds:datastoreItem xmlns:ds="http://schemas.openxmlformats.org/officeDocument/2006/customXml" ds:itemID="{758FDAC0-319D-4A54-8D8E-1D42CB1F8004}">
-  <ds:schemaRefs>
-    <ds:schemaRef ds:uri="http://schemas.microsoft.com/sharepoint/v3/contenttype/forms"/>
-  </ds:schemaRefs>
-</ds:datastoreItem>
-</file>
-
 <file path=docMetadata/LabelInfo.xml><?xml version="1.0" encoding="utf-8"?>
 <clbl:labelList xmlns:clbl="http://schemas.microsoft.com/office/2020/mipLabelMetadata">
   <clbl:label id="{f42aa342-8706-4288-bd11-ebb85995028c}" enabled="1" method="Privileged" siteId="{72f988bf-86f1-41af-91ab-2d7cd011db47}" removed="0"/>

--- a/6. Coordinating Multiple Tasks/CoordinatingTasks.pptx
+++ b/6. Coordinating Multiple Tasks/CoordinatingTasks.pptx
@@ -8342,8 +8342,8 @@
         </p:blipFill>
         <p:spPr>
           <a:xfrm>
-            <a:off x="5577840" y="3244720"/>
-            <a:ext cx="6583680" cy="3454531"/>
+            <a:off x="4340170" y="3244720"/>
+            <a:ext cx="7821350" cy="3454531"/>
           </a:xfrm>
           <a:prstGeom prst="rect">
             <a:avLst/>

--- a/6. Coordinating Multiple Tasks/CoordinatingTasks.pptx
+++ b/6. Coordinating Multiple Tasks/CoordinatingTasks.pptx
@@ -255,7 +255,7 @@
               <a:rPr lang="en-US" smtClean="0">
                 <a:latin typeface="Segoe UI" pitchFamily="34" charset="0"/>
               </a:rPr>
-              <a:t>9/14/26 7:58 PM</a:t>
+              <a:t>9/15/26 11:09 AM</a:t>
             </a:fld>
             <a:endParaRPr lang="en-US">
               <a:latin typeface="Segoe UI" pitchFamily="34" charset="0"/>
@@ -533,7 +533,7 @@
           <a:p>
             <a:fld id="{D18B56EA-E28F-4F92-9F16-7A6F2501B303}" type="datetime8">
               <a:rPr lang="en-US" smtClean="0"/>
-              <a:t>9/14/26 7:58 PM</a:t>
+              <a:t>9/15/26 10:40 AM</a:t>
             </a:fld>
             <a:endParaRPr lang="en-US"/>
           </a:p>
@@ -9400,7 +9400,7 @@
                   <a:lin ang="5400000" scaled="0"/>
                 </a:gradFill>
               </a:rPr>
-              <a:t>AggregateException</a:t>
+              <a:t>What Happens when A Task Faults?</a:t>
             </a:r>
             <a:endParaRPr lang="en-US" sz="4000" dirty="0">
               <a:gradFill>
@@ -9431,7 +9431,7 @@
         <p:spPr>
           <a:xfrm>
             <a:off x="274320" y="1627632"/>
-            <a:ext cx="11887200" cy="1766637"/>
+            <a:ext cx="11887200" cy="2049792"/>
           </a:xfrm>
         </p:spPr>
         <p:txBody>
@@ -9439,33 +9439,75 @@
           <a:lstStyle/>
           <a:p>
             <a:r>
-              <a:rPr lang="en-US" dirty="0"/>
-              <a:t>`</a:t>
-            </a:r>
-            <a:r>
-              <a:rPr lang="en-US" dirty="0" err="1"/>
-              <a:t>await`s</a:t>
-            </a:r>
-            <a:r>
-              <a:rPr lang="en-US" dirty="0"/>
-              <a:t> every Task</a:t>
+              <a:rPr lang="en-US" sz="3200" dirty="0"/>
+              <a:t>Continues to `await` every Task</a:t>
             </a:r>
           </a:p>
           <a:p>
             <a:pPr lvl="1"/>
             <a:r>
-              <a:rPr lang="en-US" dirty="0"/>
+              <a:rPr lang="en-US" sz="2400" dirty="0"/>
               <a:t>Even if one has Faulted</a:t>
             </a:r>
           </a:p>
           <a:p>
             <a:r>
-              <a:rPr lang="en-US" dirty="0"/>
-              <a:t>`await` rethrows only the first exception</a:t>
-            </a:r>
+              <a:rPr lang="en-US" sz="3200" dirty="0"/>
+              <a:t>`await` rethrows only </a:t>
+            </a:r>
+            <a:r>
+              <a:rPr lang="en-US" b="1" dirty="0"/>
+              <a:t>one</a:t>
+            </a:r>
+            <a:r>
+              <a:rPr lang="en-US" sz="3200" dirty="0"/>
+              <a:t> Exception</a:t>
+            </a:r>
+          </a:p>
+          <a:p>
+            <a:pPr lvl="1"/>
+            <a:r>
+              <a:rPr lang="en-US" sz="2400" dirty="0"/>
+              <a:t>However, all Exceptions are available in </a:t>
+            </a:r>
+            <a:r>
+              <a:rPr lang="en-US" sz="2400" dirty="0" err="1"/>
+              <a:t>Task.Exception.InnerExceptions</a:t>
+            </a:r>
+            <a:endParaRPr lang="en-US" sz="2400" dirty="0"/>
           </a:p>
         </p:txBody>
       </p:sp>
+      <p:pic>
+        <p:nvPicPr>
+          <p:cNvPr id="7" name="Picture 6">
+            <a:extLst>
+              <a:ext uri="{FF2B5EF4-FFF2-40B4-BE49-F238E27FC236}">
+                <a16:creationId xmlns:a16="http://schemas.microsoft.com/office/drawing/2014/main" id="{337DB9D1-E573-DF3C-1C73-0B70148112FE}"/>
+              </a:ext>
+            </a:extLst>
+          </p:cNvPr>
+          <p:cNvPicPr>
+            <a:picLocks noChangeAspect="1"/>
+          </p:cNvPicPr>
+          <p:nvPr/>
+        </p:nvPicPr>
+        <p:blipFill>
+          <a:blip r:embed="rId3"/>
+          <a:stretch>
+            <a:fillRect/>
+          </a:stretch>
+        </p:blipFill>
+        <p:spPr>
+          <a:xfrm>
+            <a:off x="6516413" y="3677424"/>
+            <a:ext cx="5500906" cy="3094260"/>
+          </a:xfrm>
+          <a:prstGeom prst="rect">
+            <a:avLst/>
+          </a:prstGeom>
+        </p:spPr>
+      </p:pic>
     </p:spTree>
   </p:cSld>
   <p:clrMapOvr>
@@ -11173,15 +11215,6 @@
 </file>
 
 <file path=customXml/item2.xml><?xml version="1.0" encoding="utf-8"?>
-<?mso-contentType ?>
-<FormTemplates xmlns="http://schemas.microsoft.com/sharepoint/v3/contenttype/forms">
-  <Display>DocumentLibraryForm</Display>
-  <Edit>DocumentLibraryForm</Edit>
-  <New>DocumentLibraryForm</New>
-</FormTemplates>
-</file>
-
-<file path=customXml/item3.xml><?xml version="1.0" encoding="utf-8"?>
 <ct:contentTypeSchema xmlns:ct="http://schemas.microsoft.com/office/2006/metadata/contentType" xmlns:ma="http://schemas.microsoft.com/office/2006/metadata/properties/metaAttributes" ct:_="" ma:_="" ma:contentTypeName="Document" ma:contentTypeID="0x010100A33D2391BFF58241AEB203BD95DC1F89" ma:contentTypeVersion="16" ma:contentTypeDescription="Create a new document." ma:contentTypeScope="" ma:versionID="bd4b5e6fa70efd11586bd069caa6259f">
   <xsd:schema xmlns:xsd="http://www.w3.org/2001/XMLSchema" xmlns:xs="http://www.w3.org/2001/XMLSchema" xmlns:p="http://schemas.microsoft.com/office/2006/metadata/properties" xmlns:ns1="http://schemas.microsoft.com/sharepoint/v3" xmlns:ns2="16dc66bd-df5a-4495-a5c9-5e296f49988a" xmlns:ns3="12239fb0-26c0-4a37-b790-6c81fba9d0fc" targetNamespace="http://schemas.microsoft.com/office/2006/metadata/properties" ma:root="true" ma:fieldsID="1236f19879e555dfdef409a5be7c6d72" ns1:_="" ns2:_="" ns3:_="">
     <xsd:import namespace="http://schemas.microsoft.com/sharepoint/v3"/>
@@ -11427,6 +11460,15 @@
 </ct:contentTypeSchema>
 </file>
 
+<file path=customXml/item3.xml><?xml version="1.0" encoding="utf-8"?>
+<?mso-contentType ?>
+<FormTemplates xmlns="http://schemas.microsoft.com/sharepoint/v3/contenttype/forms">
+  <Display>DocumentLibraryForm</Display>
+  <Edit>DocumentLibraryForm</Edit>
+  <New>DocumentLibraryForm</New>
+</FormTemplates>
+</file>
+
 <file path=customXml/itemProps1.xml><?xml version="1.0" encoding="utf-8"?>
 <ds:datastoreItem xmlns:ds="http://schemas.openxmlformats.org/officeDocument/2006/customXml" ds:itemID="{B59C5458-A72E-4627-9FFC-D350DCB4700F}">
   <ds:schemaRefs>
@@ -11446,14 +11488,6 @@
 </file>
 
 <file path=customXml/itemProps2.xml><?xml version="1.0" encoding="utf-8"?>
-<ds:datastoreItem xmlns:ds="http://schemas.openxmlformats.org/officeDocument/2006/customXml" ds:itemID="{758FDAC0-319D-4A54-8D8E-1D42CB1F8004}">
-  <ds:schemaRefs>
-    <ds:schemaRef ds:uri="http://schemas.microsoft.com/sharepoint/v3/contenttype/forms"/>
-  </ds:schemaRefs>
-</ds:datastoreItem>
-</file>
-
-<file path=customXml/itemProps3.xml><?xml version="1.0" encoding="utf-8"?>
 <ds:datastoreItem xmlns:ds="http://schemas.openxmlformats.org/officeDocument/2006/customXml" ds:itemID="{F517AA3B-FC88-46DF-B5BA-DC6634CFCC94}">
   <ds:schemaRefs>
     <ds:schemaRef ds:uri="12239fb0-26c0-4a37-b790-6c81fba9d0fc"/>
@@ -11473,6 +11507,14 @@
 </ds:datastoreItem>
 </file>
 
+<file path=customXml/itemProps3.xml><?xml version="1.0" encoding="utf-8"?>
+<ds:datastoreItem xmlns:ds="http://schemas.openxmlformats.org/officeDocument/2006/customXml" ds:itemID="{758FDAC0-319D-4A54-8D8E-1D42CB1F8004}">
+  <ds:schemaRefs>
+    <ds:schemaRef ds:uri="http://schemas.microsoft.com/sharepoint/v3/contenttype/forms"/>
+  </ds:schemaRefs>
+</ds:datastoreItem>
+</file>
+
 <file path=docMetadata/LabelInfo.xml><?xml version="1.0" encoding="utf-8"?>
 <clbl:labelList xmlns:clbl="http://schemas.microsoft.com/office/2020/mipLabelMetadata">
   <clbl:label id="{f42aa342-8706-4288-bd11-ebb85995028c}" enabled="1" method="Privileged" siteId="{72f988bf-86f1-41af-91ab-2d7cd011db47}" removed="0"/>

--- a/6. Coordinating Multiple Tasks/CoordinatingTasks.pptx
+++ b/6. Coordinating Multiple Tasks/CoordinatingTasks.pptx
@@ -1033,7 +1033,7 @@
           <a:lstStyle/>
           <a:p>
             <a:r>
-              <a:t>Read the first three bullets as one sentence. WhenEach streams results from multiple Tasks running in parallel, you consume it with await foreach, and the loop body runs once per completed Task, at the moment it completes. Tasks are handed to you as they complete, so in practice you see them roughly in finishing order rather than the order you passed them in. The docs deliberately do not guarantee an exact order for Tasks that complete at nearly the same time, so do not depend on the sequence. Depend on the fact that you get each one as soon as it is done. The .NET 9 line matters for your day job. If your team is on .NET 8, this method is not there and you fall back to the WhenAny loop. The last two bullets are where people trip. WhenEach yields a Task, so you await it inside the loop to get the value. And a faulted Task is yielded exactly like a successful one, so if you did not handle the failure closer to the call, that inner await is where it throws, and it will end your foreach loop. https://learn.microsoft.com/dotnet/api/system.threading.tasks.task.wheneach</a:t>
+              <a:t>Read the two bullets as one sentence. WhenEach streams results from multiple Tasks running in parallel, you consume it with await foreach, and the loop body runs once per completed Task, at the moment it completes. Tasks are handed to you as they complete, so in practice you see them roughly in finishing order rather than the order you passed them in. The docs deliberately do not guarantee an exact order for Tasks that complete at nearly the same time, so do not depend on the sequence. Depend on the fact that you get each one as soon as it is done. The .NET 9 requirement matters for your day job. If your team is on .NET 8, this method is not there and you fall back to the WhenAny loop. Two details are where people trip. WhenEach yields a Task, so you await it inside the loop to get the value. And a faulted Task is yielded exactly like a successful one, so if you did not handle the failure closer to the call, that inner await is where it throws, and it will end your foreach loop. https://learn.microsoft.com/dotnet/api/system.threading.tasks.task.wheneach</a:t>
             </a:r>
           </a:p>
         </p:txBody>
@@ -1103,7 +1103,7 @@
           <a:lstStyle/>
           <a:p>
             <a:r>
-              <a:t>Nine lines, and three of them are comments. Build the list of Tasks first, which starts all of them. Hand the list to Task.WhenEach and await foreach over the result. Each time a Task finishes, the loop body runs with that Task in hand, and awaiting it gives you the value. Compare this against the WhenAny loop two slides back: no pending list, no Remove, and nothing you can forget that turns into an infinite loop. The total time is identical to WhenAll, because both finish when the slowest Task finishes. The only difference is what the user sees along the way. WhenAll shows a spinner and then everything at once. WhenEach fills the screen in as the answers land, which feels dramatically faster even though the clock reads the same number. https://learn.microsoft.com/dotnet/csharp/asynchronous-programming/generate-consume-asynchronous-stream</a:t>
+              <a:t>Nine lines, and three of them are comments. Build the list of Tasks first, which starts all of them. Hand the list to Task.WhenEach and await foreach over the result. Each time a Task finishes, the loop body runs with that Task in hand, and awaiting it gives you the value. Compare this against the WhenAny loop three slides back: no pending list, no Remove, and nothing you can forget that turns into an infinite loop. The total time is identical to WhenAll, because both finish when the slowest Task finishes. The only difference is what the user sees along the way. WhenAll followed by a single repaint shows a spinner and then everything at once. WhenEach fills the screen in as the answers land, which feels dramatically faster even though the clock reads the same number. https://learn.microsoft.com/dotnet/csharp/asynchronous-programming/generate-consume-asynchronous-stream</a:t>
             </a:r>
           </a:p>
         </p:txBody>
@@ -1243,7 +1243,7 @@
           <a:lstStyle/>
           <a:p>
             <a:r>
-              <a:t>Twenty minutes. Open the Start project, run it, and click the button before you change anything, because the timings on the cards are the evidence. You should see 0.7, 1.6, 2.8 and 3.4 seconds, one card reading never requested, and 4.2 seconds on the tile. Then go fix it. Start all five calls before you await any of them, give each call somewhere to fail that is not the whole page, and repaint as each service answers. Any of the three primitives will get the clock down to 1.2 seconds. Which one you pick decides whether the cards appear together or one at a time. When you are done you should have five cards, four of them green with timings between 0.6 and 1.2 seconds, one red carrying a short failure message, with the 503 itself in your terminal, and no banner across the top. Then we will review approaches together before the walkthrough.</a:t>
+              <a:t>Twenty minutes. Open the Start project, run it, and look at the Product page before you change anything, because the timings on the cards are the evidence. You should see 0.7, 1.6, 2.8 and 3.4 seconds, one card reading never requested, and 4.2 seconds on the tile. The workshop guide docked beside the page walks you through three steps, one bug at a time, and right now it says it stopped at Step 1. Then go fix it. Start all five calls before you await any of them, give each call somewhere to fail that is not the whole page, and repaint as each service answers. Any of the three primitives will get the clock down to 1.2 seconds, but the last step also expects the cards to appear one at a time, so think about where the page repaints, not just which primitive you pick. When you are done you should have five cards, four of them green with timings between 0.6 and 1.2 seconds, one red carrying a short failure message, with the 503 itself in your terminal, no yellow banner above the panels, and 3 of 3 steps passing in the workshop guide. Then we will review approaches together before the walkthrough.</a:t>
             </a:r>
           </a:p>
         </p:txBody>
@@ -1523,7 +1523,7 @@
           <a:lstStyle/>
           <a:p>
             <a:r>
-              <a:t>The first three bullets are the shortest true description of the API. WhenAll awaits multiple Tasks that are already running in parallel, it runs until all of them are complete, and it happily takes a List of Task, an array, or anything else enumerable. The fourth bullet is the payoff. Five calls of 700, 900, 1200, 600 and 800 milliseconds cost 1.2 seconds under WhenAll, because the clock runs once for all of them instead of once each. The generic overload is worth knowing: when every Task returns the same type, WhenAll gives you back a Task of an array, ordered the way you passed the Tasks in, not the order they finished. The last bullet is the one honest downside. WhenAll completes exactly once, so your user sees nothing at all until the slowest service has answered. https://learn.microsoft.com/dotnet/api/system.threading.tasks.task.whenall</a:t>
+              <a:t>The first three bullets are the shortest true description of the API. WhenAll awaits multiple Tasks that are already running in parallel, it runs until all of them are complete, and it happily takes a List of Task, an array, or anything else enumerable. Then there is the payoff. Five calls of 700, 900, 1200, 600 and 800 milliseconds cost 1.2 seconds under WhenAll, because the clock runs once for all of them instead of once each. The fourth bullet, the generic overload, is worth knowing: when every Task returns the same type, WhenAll gives you back a Task of an array, ordered the way you passed the Tasks in, not the order they finished. There is one honest downside. WhenAll completes exactly once, so if the page only repaints after it, your user sees nothing at all until the slowest service has answered. https://learn.microsoft.com/dotnet/api/system.threading.tasks.task.whenall</a:t>
             </a:r>
           </a:p>
         </p:txBody>
@@ -1663,7 +1663,7 @@
           <a:lstStyle/>
           <a:p>
             <a:r>
-              <a:t>This is where WhenAll gets misunderstood. It never abandons work. If the second Task faults after 200 milliseconds, WhenAll still waits for the other four, and only then does its own Task fault. That is usually what you want, but it means a failure buys you no time back. The second surprise is the exception. Awaiting a faulted WhenAll rethrows a single exception, and it is the first one in the order you passed the Tasks in, not the first one to fail. If the second Task in your list faults at 200 milliseconds and the first faults at 900, await still throws the first list entry's exception. The others are not lost, they are simply not thrown. Keep the Task in a variable, catch, and read its Exception property to get the AggregateException, then walk InnerExceptions for the full set. And notice the last bullet: even with WhenAll, one try block around the whole thing is still one shared failure. If each caller has to fail on its own, the try has to move next to each call. https://learn.microsoft.com/dotnet/standard/parallel-programming/exception-handling-task-parallel-library</a:t>
+              <a:t>This is where WhenAll gets misunderstood. It never abandons work. If the second Task faults after 200 milliseconds, WhenAll still waits for the other four, and only then does its own Task fault. That is usually what you want, but it means a failure buys you no time back. The second surprise is the exception. Awaiting a faulted WhenAll rethrows a single exception, and it is the first one in the order you passed the Tasks in, not the first one to fail. If the second Task in your list faults at 200 milliseconds and the first faults at 900, await still throws the first list entry's exception. The others are not lost, they are simply not thrown. Keep the Task in a variable, catch, and read its Exception property to get the AggregateException, then walk InnerExceptions for the full set. And notice the shape of the code on the slide: even with WhenAll, one try block around the whole thing is still one shared failure. If each call has to fail on its own, the try has to move next to each call. https://learn.microsoft.com/dotnet/standard/parallel-programming/exception-handling-task-parallel-library</a:t>
             </a:r>
           </a:p>
         </p:txBody>
@@ -1803,7 +1803,7 @@
           <a:lstStyle/>
           <a:p>
             <a:r>
-              <a:t>Same first three bullets as WhenAll, with one word changed: it runs until one Task has completed. Everything else follows from that word. WhenAny gives you the Task that won, not the value, so you await that Task a second time to get its result, and because it is already complete that second await is nearly free. WhenAny completing does not mean success. If the winner faulted, WhenAny still completes successfully and hands you the faulted Task, and the throw happens on your second await. Treat that as a feature: it lets you inspect a loser as easily as a winner. The uses on the last bullet are the ones you will actually write. A timeout is just your work Task racing a Task.Delay, and whichever comes back first tells you what happened. https://learn.microsoft.com/dotnet/api/system.threading.tasks.task.whenany</a:t>
+              <a:t>The first two bullets are the same as WhenAll, with one word changed: it runs until one Task has completed. Everything else follows from that word. WhenAny gives you the Task that won, not the value, so you await that Task a second time to get its result, and because it is already complete that second await is nearly free. WhenAny completing does not mean success. If the winner faulted, WhenAny still completes successfully and hands you the faulted Task, and the throw happens on your second await. Treat that as a feature: it lets you inspect a loser as easily as a winner. The classic uses from the last slide are the ones you will actually write. A timeout is just your work Task racing a Task.Delay, and whichever comes back first tells you what happened. https://learn.microsoft.com/dotnet/api/system.threading.tasks.task.whenany</a:t>
             </a:r>
           </a:p>
         </p:txBody>
@@ -8660,7 +8660,7 @@
             </a:pPr>
             <a:r>
               <a:rPr lang="en-US" dirty="0"/>
-              <a:t>Run it, click Load product page, read the timings</a:t>
+              <a:t>Run it, read the timings, follow the workshop guide</a:t>
             </a:r>
           </a:p>
           <a:p>
@@ -8680,7 +8680,7 @@
             </a:pPr>
             <a:r>
               <a:rPr lang="en-US" dirty="0"/>
-              <a:t>Paint each panel as its own service answers</a:t>
+              <a:t>Let a failing service break only its own panel</a:t>
             </a:r>
           </a:p>
           <a:p>
@@ -8690,7 +8690,7 @@
             </a:pPr>
             <a:r>
               <a:rPr lang="en-US" dirty="0"/>
-              <a:t>Keep the broken service inside its own panel</a:t>
+              <a:t>Paint each panel as its own service answers</a:t>
             </a:r>
           </a:p>
           <a:p>
